--- a/slides/Module-6-Video-7-Two-Part-Tariffs.pptx
+++ b/slides/Module-6-Video-7-Two-Part-Tariffs.pptx
@@ -217,7 +217,7 @@
           <a:p>
             <a:fld id="{1063EF34-BBF4-4EE4-A8C7-B7C7750069CA}" type="datetimeFigureOut">
               <a:rPr lang="en-US" smtClean="0"/>
-              <a:t>9/23/2026</a:t>
+              <a:t>9/28/2026</a:t>
             </a:fld>
             <a:endParaRPr lang="en-US"/>
           </a:p>
@@ -1201,7 +1201,7 @@
           <a:p>
             <a:fld id="{5BCAD085-E8A6-8845-BD4E-CB4CCA059FC4}" type="datetimeFigureOut">
               <a:rPr lang="en-US" smtClean="0"/>
-              <a:t>9/23/2026</a:t>
+              <a:t>9/28/2026</a:t>
             </a:fld>
             <a:endParaRPr lang="en-US"/>
           </a:p>
@@ -1412,7 +1412,7 @@
           <a:p>
             <a:fld id="{5BCAD085-E8A6-8845-BD4E-CB4CCA059FC4}" type="datetimeFigureOut">
               <a:rPr lang="en-US" smtClean="0"/>
-              <a:t>9/23/2026</a:t>
+              <a:t>9/28/2026</a:t>
             </a:fld>
             <a:endParaRPr lang="en-US"/>
           </a:p>
@@ -3832,8 +3832,8 @@
             </a:p>
           </p:txBody>
         </p:sp>
-        <mc:AlternateContent xmlns:mc="http://schemas.openxmlformats.org/markup-compatibility/2006">
-          <mc:Choice xmlns:a14="http://schemas.microsoft.com/office/drawing/2010/main" Requires="a14">
+        <mc:AlternateContent xmlns:mc="http://schemas.openxmlformats.org/markup-compatibility/2006" xmlns:a14="http://schemas.microsoft.com/office/drawing/2010/main">
+          <mc:Choice Requires="a14">
             <p:sp>
               <p:nvSpPr>
                 <p:cNvPr id="23" name="TextBox 22"/>
@@ -3904,7 +3904,7 @@
               </p:txBody>
             </p:sp>
           </mc:Choice>
-          <mc:Fallback>
+          <mc:Fallback xmlns="">
             <p:sp>
               <p:nvSpPr>
                 <p:cNvPr id="23" name="TextBox 22"/>
@@ -8562,7 +8562,7 @@
         <p:spPr>
           <a:xfrm>
             <a:off x="251999" y="502920"/>
-            <a:ext cx="11687697" cy="640080"/>
+            <a:ext cx="11687697" cy="492443"/>
           </a:xfrm>
           <a:prstGeom prst="rect">
             <a:avLst/>
@@ -8577,14 +8577,29 @@
           <a:p>
             <a:pPr algn="l"/>
             <a:r>
-              <a:rPr sz="3200" b="1" i="0" u="none">
+              <a:rPr sz="3200" b="1" i="0" u="none" dirty="0">
                 <a:solidFill>
                   <a:srgbClr val="0B2B4E"/>
                 </a:solidFill>
                 <a:latin typeface="Calibri"/>
               </a:rPr>
-              <a:t>Two-Part Tariff: Summary</a:t>
+              <a:t>Two-Part Tariff: </a:t>
             </a:r>
+            <a:r>
+              <a:rPr lang="en-US" sz="3200" b="1" i="0" u="none" dirty="0">
+                <a:solidFill>
+                  <a:srgbClr val="0B2B4E"/>
+                </a:solidFill>
+                <a:latin typeface="Calibri"/>
+              </a:rPr>
+              <a:t>Overview</a:t>
+            </a:r>
+            <a:endParaRPr sz="3200" b="1" i="0" u="none" dirty="0">
+              <a:solidFill>
+                <a:srgbClr val="0B2B4E"/>
+              </a:solidFill>
+              <a:latin typeface="Calibri"/>
+            </a:endParaRPr>
           </a:p>
         </p:txBody>
       </p:sp>
@@ -13936,8 +13951,8 @@
           </a:fontRef>
         </p:style>
       </p:cxnSp>
-      <mc:AlternateContent xmlns:mc="http://schemas.openxmlformats.org/markup-compatibility/2006">
-        <mc:Choice xmlns:a14="http://schemas.microsoft.com/office/drawing/2010/main" Requires="a14">
+      <mc:AlternateContent xmlns:mc="http://schemas.openxmlformats.org/markup-compatibility/2006" xmlns:a14="http://schemas.microsoft.com/office/drawing/2010/main">
+        <mc:Choice Requires="a14">
           <p:sp>
             <p:nvSpPr>
               <p:cNvPr id="25" name="TextBox 24"/>
@@ -14077,7 +14092,7 @@
             </p:txBody>
           </p:sp>
         </mc:Choice>
-        <mc:Fallback>
+        <mc:Fallback xmlns="">
           <p:sp>
             <p:nvSpPr>
               <p:cNvPr id="25" name="TextBox 24"/>
@@ -16735,8 +16750,8 @@
           </a:p>
         </p:txBody>
       </p:sp>
-      <mc:AlternateContent xmlns:mc="http://schemas.openxmlformats.org/markup-compatibility/2006">
-        <mc:Choice xmlns:a14="http://schemas.microsoft.com/office/drawing/2010/main" Requires="a14">
+      <mc:AlternateContent xmlns:mc="http://schemas.openxmlformats.org/markup-compatibility/2006" xmlns:a14="http://schemas.microsoft.com/office/drawing/2010/main">
+        <mc:Choice Requires="a14">
           <p:sp>
             <p:nvSpPr>
               <p:cNvPr id="26" name="TextBox 25"/>
@@ -16876,7 +16891,7 @@
             </p:txBody>
           </p:sp>
         </mc:Choice>
-        <mc:Fallback>
+        <mc:Fallback xmlns="">
           <p:sp>
             <p:nvSpPr>
               <p:cNvPr id="26" name="TextBox 25"/>
